--- a/presentation/output/тг_бот_презентация.pptx
+++ b/presentation/output/тг_бот_презентация.pptx
@@ -2,20 +2,20 @@
 <file path=ppt/presentation.xml><?xml version="1.0" encoding="utf-8"?>
 <p:presentation xmlns:p="http://schemas.openxmlformats.org/presentationml/2006/main">
   <p:sldMasterIdLst>
-    <p:sldMasterId xmlns:r="http://schemas.openxmlformats.org/officeDocument/2006/relationships" id="2147483648" r:id="R5bc7d705fe504492"/>
+    <p:sldMasterId xmlns:r="http://schemas.openxmlformats.org/officeDocument/2006/relationships" id="2147483648" r:id="R289db310daeb48a1"/>
   </p:sldMasterIdLst>
   <p:notesMasterIdLst>
-    <p:notesMasterId xmlns:r="http://schemas.openxmlformats.org/officeDocument/2006/relationships" r:id="R1ff919aa3ed74f02"/>
+    <p:notesMasterId xmlns:r="http://schemas.openxmlformats.org/officeDocument/2006/relationships" r:id="Re0ef20f6fad6466f"/>
   </p:notesMasterIdLst>
   <p:sldIdLst>
-    <p:sldId xmlns:r="http://schemas.openxmlformats.org/officeDocument/2006/relationships" id="256" r:id="R0bfca1dc3d1846a9"/>
-    <p:sldId xmlns:r="http://schemas.openxmlformats.org/officeDocument/2006/relationships" id="257" r:id="Rf32f1bb6d656408d"/>
-    <p:sldId xmlns:r="http://schemas.openxmlformats.org/officeDocument/2006/relationships" id="258" r:id="Rd4ff8b9a5d2c419f"/>
-    <p:sldId xmlns:r="http://schemas.openxmlformats.org/officeDocument/2006/relationships" id="259" r:id="Re0aa0f81096c4bf2"/>
-    <p:sldId xmlns:r="http://schemas.openxmlformats.org/officeDocument/2006/relationships" id="260" r:id="R83f97b19b85145fd"/>
-    <p:sldId xmlns:r="http://schemas.openxmlformats.org/officeDocument/2006/relationships" id="261" r:id="Raf2ceec9f0304b4d"/>
-    <p:sldId xmlns:r="http://schemas.openxmlformats.org/officeDocument/2006/relationships" id="262" r:id="R120913fa66044b17"/>
-    <p:sldId xmlns:r="http://schemas.openxmlformats.org/officeDocument/2006/relationships" id="263" r:id="R1c27b31aec6d4041"/>
+    <p:sldId xmlns:r="http://schemas.openxmlformats.org/officeDocument/2006/relationships" id="256" r:id="Re5f0322dfdb5445b"/>
+    <p:sldId xmlns:r="http://schemas.openxmlformats.org/officeDocument/2006/relationships" id="257" r:id="R01b23429efd04243"/>
+    <p:sldId xmlns:r="http://schemas.openxmlformats.org/officeDocument/2006/relationships" id="258" r:id="R706b3f0f49344104"/>
+    <p:sldId xmlns:r="http://schemas.openxmlformats.org/officeDocument/2006/relationships" id="259" r:id="Rfb9294e54cd2496f"/>
+    <p:sldId xmlns:r="http://schemas.openxmlformats.org/officeDocument/2006/relationships" id="260" r:id="R07ccb2206a80413e"/>
+    <p:sldId xmlns:r="http://schemas.openxmlformats.org/officeDocument/2006/relationships" id="261" r:id="R951bdbe91330475b"/>
+    <p:sldId xmlns:r="http://schemas.openxmlformats.org/officeDocument/2006/relationships" id="262" r:id="R8302381863564b4d"/>
+    <p:sldId xmlns:r="http://schemas.openxmlformats.org/officeDocument/2006/relationships" id="263" r:id="Rbf795fd484b8446c"/>
   </p:sldIdLst>
   <p:sldSz cx="18288000" cy="10287000"/>
   <p:notesSz cx="6858000" cy="9144000"/>
@@ -1024,7 +1024,7 @@
   </p:cSld>
   <p:clrMap bg1="lt1" tx1="dk1" bg2="lt2" tx2="dk2" accent1="accent1" accent2="accent2" accent3="accent3" accent4="accent4" accent5="accent5" accent6="accent6" hlink="hlink" folHlink="folHlink"/>
   <p:sldLayoutIdLst>
-    <p:sldLayoutId xmlns:r="http://schemas.openxmlformats.org/officeDocument/2006/relationships" id="2147483649" r:id="Rd6c763b24a9243d2"/>
+    <p:sldLayoutId xmlns:r="http://schemas.openxmlformats.org/officeDocument/2006/relationships" id="2147483649" r:id="Rec5d90fd23a04f40"/>
   </p:sldLayoutIdLst>
   <p:txStyles>
     <p:titleStyle>
@@ -1522,7 +1522,7 @@
           <p:cNvPr id="1" name="background">
             <a:extLst xmlns:a="http://schemas.openxmlformats.org/drawingml/2006/main">
               <a:ext uri="{FF2B5EF4-FFF2-40B4-BE49-F238E27FC236}">
-                <a16:creationId xmlns:a16="http://schemas.microsoft.com/office/drawing/2014/main" id="{6135C800-1CFA-49C5-9518-8E3C73AC2800}"/>
+                <a16:creationId xmlns:a16="http://schemas.microsoft.com/office/drawing/2014/main" id="{42208A5C-E415-4985-B17F-8E8DF8E30717}"/>
               </a:ext>
             </a:extLst>
           </p:cNvPr>
@@ -1549,7 +1549,7 @@
           <p:cNvPr id="2" name="slide-title">
             <a:extLst xmlns:a="http://schemas.openxmlformats.org/drawingml/2006/main">
               <a:ext uri="{FF2B5EF4-FFF2-40B4-BE49-F238E27FC236}">
-                <a16:creationId xmlns:a16="http://schemas.microsoft.com/office/drawing/2014/main" id="{F083A1C0-8C6F-4934-879F-7F6B421D3A67}"/>
+                <a16:creationId xmlns:a16="http://schemas.microsoft.com/office/drawing/2014/main" id="{42311146-BF4F-4A76-86F1-5569331FC6B6}"/>
               </a:ext>
             </a:extLst>
           </p:cNvPr>
@@ -1589,7 +1589,7 @@
           <p:cNvPr id="3" name="">
             <a:extLst xmlns:a="http://schemas.openxmlformats.org/drawingml/2006/main">
               <a:ext uri="{FF2B5EF4-FFF2-40B4-BE49-F238E27FC236}">
-                <a16:creationId xmlns:a16="http://schemas.microsoft.com/office/drawing/2014/main" id="{6651A7B8-195B-4A18-A875-CFB3CA131392}"/>
+                <a16:creationId xmlns:a16="http://schemas.microsoft.com/office/drawing/2014/main" id="{90CCE8DD-73D9-4C75-BF75-7BD5101D2DE6}"/>
               </a:ext>
             </a:extLst>
           </p:cNvPr>
@@ -1629,7 +1629,7 @@
           <p:cNvPr id="4" name="">
             <a:extLst xmlns:a="http://schemas.openxmlformats.org/drawingml/2006/main">
               <a:ext uri="{FF2B5EF4-FFF2-40B4-BE49-F238E27FC236}">
-                <a16:creationId xmlns:a16="http://schemas.microsoft.com/office/drawing/2014/main" id="{04322DB0-2032-4089-A737-9DFE9C67799A}"/>
+                <a16:creationId xmlns:a16="http://schemas.microsoft.com/office/drawing/2014/main" id="{D1868F11-AE31-49B0-B01D-D27CF6378545}"/>
               </a:ext>
             </a:extLst>
           </p:cNvPr>
@@ -1669,7 +1669,7 @@
           <p:cNvPr id="5" name="">
             <a:extLst xmlns:a="http://schemas.openxmlformats.org/drawingml/2006/main">
               <a:ext uri="{FF2B5EF4-FFF2-40B4-BE49-F238E27FC236}">
-                <a16:creationId xmlns:a16="http://schemas.microsoft.com/office/drawing/2014/main" id="{EE6AC8CA-6A76-47DE-AA68-BDDC155A7C89}"/>
+                <a16:creationId xmlns:a16="http://schemas.microsoft.com/office/drawing/2014/main" id="{05135E92-64E1-41C6-81B6-FD2719B6CCFA}"/>
               </a:ext>
             </a:extLst>
           </p:cNvPr>
@@ -1709,7 +1709,7 @@
           <p:cNvPr id="6" name="">
             <a:extLst xmlns:a="http://schemas.openxmlformats.org/drawingml/2006/main">
               <a:ext uri="{FF2B5EF4-FFF2-40B4-BE49-F238E27FC236}">
-                <a16:creationId xmlns:a16="http://schemas.microsoft.com/office/drawing/2014/main" id="{40A2D1BD-7105-42CE-96CE-7D51434C1896}"/>
+                <a16:creationId xmlns:a16="http://schemas.microsoft.com/office/drawing/2014/main" id="{AB2BEDC3-EC8C-4817-B172-B773EE46C129}"/>
               </a:ext>
             </a:extLst>
           </p:cNvPr>
@@ -1721,7 +1721,7 @@
         <p:spPr>
           <a:xfrm xmlns:a="http://schemas.openxmlformats.org/drawingml/2006/main">
             <a:off x="838200" y="6496050"/>
-            <a:ext cx="5791200" cy="2381250"/>
+            <a:ext cx="6419850" cy="2381250"/>
           </a:xfrm>
           <a:prstGeom xmlns:a="http://schemas.openxmlformats.org/drawingml/2006/main" prst="rect">
             <a:avLst/>
@@ -1787,7 +1787,7 @@
               </a:defRPr>
             </a:pPr>
             <a:r>
-              <a:t>• Хранение данных: PostgreSQL / SQLite fallback и SQLAlchemy</a:t>
+              <a:t>• База и деплой: PostgreSQL, SQLite fallback, Aeza VPS, systemd</a:t>
             </a:r>
           </a:p>
           <a:p xmlns:a="http://schemas.openxmlformats.org/drawingml/2006/main">
@@ -1821,7 +1821,7 @@
           <p:cNvPr id="7" name="source">
             <a:extLst xmlns:a="http://schemas.openxmlformats.org/drawingml/2006/main">
               <a:ext uri="{FF2B5EF4-FFF2-40B4-BE49-F238E27FC236}">
-                <a16:creationId xmlns:a16="http://schemas.microsoft.com/office/drawing/2014/main" id="{70D32CE0-1EBC-4FE5-AEA8-1B70E3001ED3}"/>
+                <a16:creationId xmlns:a16="http://schemas.microsoft.com/office/drawing/2014/main" id="{011006F0-3A6B-4D69-8CB1-62A63C6789A0}"/>
               </a:ext>
             </a:extLst>
           </p:cNvPr>
@@ -1859,7 +1859,7 @@
     </p:spTree>
     <p:extLst>
       <p:ext uri="{BB962C8B-B14F-4D97-AF65-F5344CB8AC3E}">
-        <p14:creationId xmlns:p14="http://schemas.microsoft.com/office/powerpoint/2010/main" val="1289111004"/>
+        <p14:creationId xmlns:p14="http://schemas.microsoft.com/office/powerpoint/2010/main" val="65171956"/>
       </p:ext>
     </p:extLst>
   </p:cSld>
@@ -1883,7 +1883,7 @@
           <p:cNvPr id="1" name="background">
             <a:extLst xmlns:a="http://schemas.openxmlformats.org/drawingml/2006/main">
               <a:ext uri="{FF2B5EF4-FFF2-40B4-BE49-F238E27FC236}">
-                <a16:creationId xmlns:a16="http://schemas.microsoft.com/office/drawing/2014/main" id="{20FFD341-22B0-4181-8046-24ED1CC64FA8}"/>
+                <a16:creationId xmlns:a16="http://schemas.microsoft.com/office/drawing/2014/main" id="{E87D5BC3-C298-4FE6-A759-48F9F36E0235}"/>
               </a:ext>
             </a:extLst>
           </p:cNvPr>
@@ -1910,7 +1910,7 @@
           <p:cNvPr id="2" name="slide-title">
             <a:extLst xmlns:a="http://schemas.openxmlformats.org/drawingml/2006/main">
               <a:ext uri="{FF2B5EF4-FFF2-40B4-BE49-F238E27FC236}">
-                <a16:creationId xmlns:a16="http://schemas.microsoft.com/office/drawing/2014/main" id="{2C66B0EF-4458-4054-A69C-7D053F032907}"/>
+                <a16:creationId xmlns:a16="http://schemas.microsoft.com/office/drawing/2014/main" id="{084772D6-7A3E-464C-A62D-5F8B0E23ADEE}"/>
               </a:ext>
             </a:extLst>
           </p:cNvPr>
@@ -1950,7 +1950,7 @@
           <p:cNvPr id="3" name="title-rule">
             <a:extLst xmlns:a="http://schemas.openxmlformats.org/drawingml/2006/main">
               <a:ext uri="{FF2B5EF4-FFF2-40B4-BE49-F238E27FC236}">
-                <a16:creationId xmlns:a16="http://schemas.microsoft.com/office/drawing/2014/main" id="{6F026CA6-B9DE-4411-9B19-962EC244F8DB}"/>
+                <a16:creationId xmlns:a16="http://schemas.microsoft.com/office/drawing/2014/main" id="{3A2125B8-4F31-417E-BD65-E8EB21C7F835}"/>
               </a:ext>
             </a:extLst>
           </p:cNvPr>
@@ -1983,7 +1983,7 @@
           <p:cNvPr id="4" name="subtitle">
             <a:extLst xmlns:a="http://schemas.openxmlformats.org/drawingml/2006/main">
               <a:ext uri="{FF2B5EF4-FFF2-40B4-BE49-F238E27FC236}">
-                <a16:creationId xmlns:a16="http://schemas.microsoft.com/office/drawing/2014/main" id="{4714F3D8-51FE-4C19-BAFE-535A87D5265F}"/>
+                <a16:creationId xmlns:a16="http://schemas.microsoft.com/office/drawing/2014/main" id="{D1897201-D5C4-456B-B80F-7A1D8A50F132}"/>
               </a:ext>
             </a:extLst>
           </p:cNvPr>
@@ -1995,7 +1995,7 @@
         <p:spPr>
           <a:xfrm xmlns:a="http://schemas.openxmlformats.org/drawingml/2006/main">
             <a:off x="838200" y="2343150"/>
-            <a:ext cx="8724900" cy="552450"/>
+            <a:ext cx="8686800" cy="838200"/>
           </a:xfrm>
           <a:prstGeom xmlns:a="http://schemas.openxmlformats.org/drawingml/2006/main" prst="rect">
             <a:avLst/>
@@ -2013,7 +2013,7 @@
               </a:defRPr>
             </a:pPr>
             <a:r>
-              <a:t>Цель проекта — создать MVP Telegram-бота для изучения английской лексики с учебными карточками, тренировками и сохранением прогресса.</a:t>
+              <a:t>Цель проекта — создать и развернуть Telegram-бота для изучения иностранной лексики с карточками, тренировками, словарем и сохранением прогресса.</a:t>
             </a:r>
           </a:p>
         </p:txBody>
@@ -2023,7 +2023,7 @@
           <p:cNvPr id="5" name="section-number-01">
             <a:extLst xmlns:a="http://schemas.openxmlformats.org/drawingml/2006/main">
               <a:ext uri="{FF2B5EF4-FFF2-40B4-BE49-F238E27FC236}">
-                <a16:creationId xmlns:a16="http://schemas.microsoft.com/office/drawing/2014/main" id="{2C5E382A-8D8D-4D2D-B3E0-1C2244086CC9}"/>
+                <a16:creationId xmlns:a16="http://schemas.microsoft.com/office/drawing/2014/main" id="{D63C7E3A-48EE-40B4-8D6C-576CF661E053}"/>
               </a:ext>
             </a:extLst>
           </p:cNvPr>
@@ -2035,7 +2035,7 @@
         <p:spPr>
           <a:xfrm xmlns:a="http://schemas.openxmlformats.org/drawingml/2006/main">
             <a:off x="10210800" y="685800"/>
-            <a:ext cx="4000500" cy="2228850"/>
+            <a:ext cx="4000500" cy="2495550"/>
           </a:xfrm>
           <a:prstGeom xmlns:a="http://schemas.openxmlformats.org/drawingml/2006/main" prst="rect">
             <a:avLst/>
@@ -2063,19 +2063,19 @@
           <p:cNvPr id="6" name="">
             <a:extLst xmlns:a="http://schemas.openxmlformats.org/drawingml/2006/main">
               <a:ext uri="{FF2B5EF4-FFF2-40B4-BE49-F238E27FC236}">
-                <a16:creationId xmlns:a16="http://schemas.microsoft.com/office/drawing/2014/main" id="{A7D76736-6E64-4792-9037-0FD0921FB0FA}"/>
-              </a:ext>
-            </a:extLst>
-          </p:cNvPr>
-          <p:cNvSpPr>
-            <a:spLocks xmlns:a="http://schemas.openxmlformats.org/drawingml/2006/main" noGrp="1"/>
-          </p:cNvSpPr>
-          <p:nvPr/>
-        </p:nvSpPr>
-        <p:spPr>
-          <a:xfrm xmlns:a="http://schemas.openxmlformats.org/drawingml/2006/main">
-            <a:off x="838200" y="3143250"/>
-            <a:ext cx="8839200" cy="6457950"/>
+                <a16:creationId xmlns:a16="http://schemas.microsoft.com/office/drawing/2014/main" id="{7BD0F4FC-8A41-4F50-9F92-E2CA5FA03466}"/>
+              </a:ext>
+            </a:extLst>
+          </p:cNvPr>
+          <p:cNvSpPr>
+            <a:spLocks xmlns:a="http://schemas.openxmlformats.org/drawingml/2006/main" noGrp="1"/>
+          </p:cNvSpPr>
+          <p:nvPr/>
+        </p:nvSpPr>
+        <p:spPr>
+          <a:xfrm xmlns:a="http://schemas.openxmlformats.org/drawingml/2006/main">
+            <a:off x="838200" y="3429000"/>
+            <a:ext cx="8839200" cy="6191250"/>
           </a:xfrm>
           <a:prstGeom xmlns:a="http://schemas.openxmlformats.org/drawingml/2006/main" prst="rect">
             <a:avLst/>
@@ -2189,7 +2189,7 @@
               </a:defRPr>
             </a:pPr>
             <a:r>
-              <a:t>• Добавить карточки, словарь, тренировки и настройки.</a:t>
+              <a:t>• Добавить карточки, словарь, тренировки, настройки и выбор языка.</a:t>
             </a:r>
           </a:p>
           <a:p xmlns:a="http://schemas.openxmlformats.org/drawingml/2006/main">
@@ -2213,7 +2213,7 @@
               </a:defRPr>
             </a:pPr>
             <a:r>
-              <a:t>• Подготовить проект к демонстрации и дальнейшему деплою.</a:t>
+              <a:t>• Развернуть проект на VPS и обеспечить автоматический перезапуск сервиса.</a:t>
             </a:r>
           </a:p>
         </p:txBody>
@@ -2223,18 +2223,18 @@
           <p:cNvPr id="7" name="">
             <a:extLst xmlns:a="http://schemas.openxmlformats.org/drawingml/2006/main">
               <a:ext uri="{FF2B5EF4-FFF2-40B4-BE49-F238E27FC236}">
-                <a16:creationId xmlns:a16="http://schemas.microsoft.com/office/drawing/2014/main" id="{E98ED8E7-1FA5-45B7-B4E2-CEF98B2F3171}"/>
-              </a:ext>
-            </a:extLst>
-          </p:cNvPr>
-          <p:cNvSpPr>
-            <a:spLocks xmlns:a="http://schemas.openxmlformats.org/drawingml/2006/main" noGrp="1"/>
-          </p:cNvSpPr>
-          <p:nvPr/>
-        </p:nvSpPr>
-        <p:spPr>
-          <a:xfrm xmlns:a="http://schemas.openxmlformats.org/drawingml/2006/main">
-            <a:off x="10210800" y="3143250"/>
+                <a16:creationId xmlns:a16="http://schemas.microsoft.com/office/drawing/2014/main" id="{6EC35253-ACCE-4392-94F3-9D723CA85AA7}"/>
+              </a:ext>
+            </a:extLst>
+          </p:cNvPr>
+          <p:cNvSpPr>
+            <a:spLocks xmlns:a="http://schemas.openxmlformats.org/drawingml/2006/main" noGrp="1"/>
+          </p:cNvSpPr>
+          <p:nvPr/>
+        </p:nvSpPr>
+        <p:spPr>
+          <a:xfrm xmlns:a="http://schemas.openxmlformats.org/drawingml/2006/main">
+            <a:off x="10210800" y="3429000"/>
             <a:ext cx="7239000" cy="285750"/>
           </a:xfrm>
           <a:prstGeom xmlns:a="http://schemas.openxmlformats.org/drawingml/2006/main" prst="rect">
@@ -2263,18 +2263,18 @@
           <p:cNvPr id="8" name="">
             <a:extLst xmlns:a="http://schemas.openxmlformats.org/drawingml/2006/main">
               <a:ext uri="{FF2B5EF4-FFF2-40B4-BE49-F238E27FC236}">
-                <a16:creationId xmlns:a16="http://schemas.microsoft.com/office/drawing/2014/main" id="{A11000AD-CD05-4187-9DEF-1FC6722E6182}"/>
-              </a:ext>
-            </a:extLst>
-          </p:cNvPr>
-          <p:cNvSpPr>
-            <a:spLocks xmlns:a="http://schemas.openxmlformats.org/drawingml/2006/main" noGrp="1"/>
-          </p:cNvSpPr>
-          <p:nvPr/>
-        </p:nvSpPr>
-        <p:spPr>
-          <a:xfrm xmlns:a="http://schemas.openxmlformats.org/drawingml/2006/main">
-            <a:off x="10210800" y="3600450"/>
+                <a16:creationId xmlns:a16="http://schemas.microsoft.com/office/drawing/2014/main" id="{C48269D8-2951-41D1-A2E4-3AAEEFDA8FF2}"/>
+              </a:ext>
+            </a:extLst>
+          </p:cNvPr>
+          <p:cNvSpPr>
+            <a:spLocks xmlns:a="http://schemas.openxmlformats.org/drawingml/2006/main" noGrp="1"/>
+          </p:cNvSpPr>
+          <p:nvPr/>
+        </p:nvSpPr>
+        <p:spPr>
+          <a:xfrm xmlns:a="http://schemas.openxmlformats.org/drawingml/2006/main">
+            <a:off x="10210800" y="3867150"/>
             <a:ext cx="3981450" cy="838200"/>
           </a:xfrm>
           <a:prstGeom xmlns:a="http://schemas.openxmlformats.org/drawingml/2006/main" prst="rect">
@@ -2303,18 +2303,18 @@
           <p:cNvPr id="9" name="">
             <a:extLst xmlns:a="http://schemas.openxmlformats.org/drawingml/2006/main">
               <a:ext uri="{FF2B5EF4-FFF2-40B4-BE49-F238E27FC236}">
-                <a16:creationId xmlns:a16="http://schemas.microsoft.com/office/drawing/2014/main" id="{6ACF9C36-BC68-45EE-B49C-A808E571F8E7}"/>
-              </a:ext>
-            </a:extLst>
-          </p:cNvPr>
-          <p:cNvSpPr>
-            <a:spLocks xmlns:a="http://schemas.openxmlformats.org/drawingml/2006/main" noGrp="1"/>
-          </p:cNvSpPr>
-          <p:nvPr/>
-        </p:nvSpPr>
-        <p:spPr>
-          <a:xfrm xmlns:a="http://schemas.openxmlformats.org/drawingml/2006/main">
-            <a:off x="10210800" y="4591050"/>
+                <a16:creationId xmlns:a16="http://schemas.microsoft.com/office/drawing/2014/main" id="{EB324DA0-A774-409B-9CFF-A6A3F931BB3C}"/>
+              </a:ext>
+            </a:extLst>
+          </p:cNvPr>
+          <p:cNvSpPr>
+            <a:spLocks xmlns:a="http://schemas.openxmlformats.org/drawingml/2006/main" noGrp="1"/>
+          </p:cNvSpPr>
+          <p:nvPr/>
+        </p:nvSpPr>
+        <p:spPr>
+          <a:xfrm xmlns:a="http://schemas.openxmlformats.org/drawingml/2006/main">
+            <a:off x="10210800" y="4857750"/>
             <a:ext cx="7239000" cy="285750"/>
           </a:xfrm>
           <a:prstGeom xmlns:a="http://schemas.openxmlformats.org/drawingml/2006/main" prst="rect">
@@ -2343,19 +2343,19 @@
           <p:cNvPr id="10" name="">
             <a:extLst xmlns:a="http://schemas.openxmlformats.org/drawingml/2006/main">
               <a:ext uri="{FF2B5EF4-FFF2-40B4-BE49-F238E27FC236}">
-                <a16:creationId xmlns:a16="http://schemas.microsoft.com/office/drawing/2014/main" id="{0CDBE42A-7CE3-4B9E-902D-7CD16ACC7BB2}"/>
-              </a:ext>
-            </a:extLst>
-          </p:cNvPr>
-          <p:cNvSpPr>
-            <a:spLocks xmlns:a="http://schemas.openxmlformats.org/drawingml/2006/main" noGrp="1"/>
-          </p:cNvSpPr>
-          <p:nvPr/>
-        </p:nvSpPr>
-        <p:spPr>
-          <a:xfrm xmlns:a="http://schemas.openxmlformats.org/drawingml/2006/main">
-            <a:off x="10210800" y="5029200"/>
-            <a:ext cx="4572000" cy="838200"/>
+                <a16:creationId xmlns:a16="http://schemas.microsoft.com/office/drawing/2014/main" id="{6A9BC9EB-8090-4CFC-883E-6D0CA9D58F6E}"/>
+              </a:ext>
+            </a:extLst>
+          </p:cNvPr>
+          <p:cNvSpPr>
+            <a:spLocks xmlns:a="http://schemas.openxmlformats.org/drawingml/2006/main" noGrp="1"/>
+          </p:cNvSpPr>
+          <p:nvPr/>
+        </p:nvSpPr>
+        <p:spPr>
+          <a:xfrm xmlns:a="http://schemas.openxmlformats.org/drawingml/2006/main">
+            <a:off x="10210800" y="5314950"/>
+            <a:ext cx="4476750" cy="1104900"/>
           </a:xfrm>
           <a:prstGeom xmlns:a="http://schemas.openxmlformats.org/drawingml/2006/main" prst="rect">
             <a:avLst/>
@@ -2373,7 +2373,7 @@
               </a:defRPr>
             </a:pPr>
             <a:r>
-              <a:t>Работающий бот с карточками, словарем, тестами, прогрессом, уровнями и напоминаниями.</a:t>
+              <a:t>Работающий бот с тремя языками, карточками, словарем, тестами, прогрессом, уровнями, напоминаниями и серверным запуском.</a:t>
             </a:r>
           </a:p>
         </p:txBody>
@@ -2381,7 +2381,7 @@
     </p:spTree>
     <p:extLst>
       <p:ext uri="{BB962C8B-B14F-4D97-AF65-F5344CB8AC3E}">
-        <p14:creationId xmlns:p14="http://schemas.microsoft.com/office/powerpoint/2010/main" val="823721594"/>
+        <p14:creationId xmlns:p14="http://schemas.microsoft.com/office/powerpoint/2010/main" val="445378751"/>
       </p:ext>
     </p:extLst>
   </p:cSld>
@@ -2405,7 +2405,7 @@
           <p:cNvPr id="1" name="background">
             <a:extLst xmlns:a="http://schemas.openxmlformats.org/drawingml/2006/main">
               <a:ext uri="{FF2B5EF4-FFF2-40B4-BE49-F238E27FC236}">
-                <a16:creationId xmlns:a16="http://schemas.microsoft.com/office/drawing/2014/main" id="{6E7F7511-684B-4650-9029-1DBC02EBDD20}"/>
+                <a16:creationId xmlns:a16="http://schemas.microsoft.com/office/drawing/2014/main" id="{EC8DDE6E-C60A-4799-BC69-189D8BD34568}"/>
               </a:ext>
             </a:extLst>
           </p:cNvPr>
@@ -2432,7 +2432,7 @@
           <p:cNvPr id="2" name="slide-title">
             <a:extLst xmlns:a="http://schemas.openxmlformats.org/drawingml/2006/main">
               <a:ext uri="{FF2B5EF4-FFF2-40B4-BE49-F238E27FC236}">
-                <a16:creationId xmlns:a16="http://schemas.microsoft.com/office/drawing/2014/main" id="{B63E10D7-10EB-4D51-A287-3960616AC4EC}"/>
+                <a16:creationId xmlns:a16="http://schemas.microsoft.com/office/drawing/2014/main" id="{A9C6E5B4-2DBA-4D28-944C-C52B2F640281}"/>
               </a:ext>
             </a:extLst>
           </p:cNvPr>
@@ -2472,7 +2472,7 @@
           <p:cNvPr id="3" name="title-rule">
             <a:extLst xmlns:a="http://schemas.openxmlformats.org/drawingml/2006/main">
               <a:ext uri="{FF2B5EF4-FFF2-40B4-BE49-F238E27FC236}">
-                <a16:creationId xmlns:a16="http://schemas.microsoft.com/office/drawing/2014/main" id="{546943BE-A116-4B48-80C4-B86594C4C3AE}"/>
+                <a16:creationId xmlns:a16="http://schemas.microsoft.com/office/drawing/2014/main" id="{0A9368B6-3E81-4D69-9351-F01178A98DED}"/>
               </a:ext>
             </a:extLst>
           </p:cNvPr>
@@ -2505,7 +2505,7 @@
           <p:cNvPr id="4" name="subtitle">
             <a:extLst xmlns:a="http://schemas.openxmlformats.org/drawingml/2006/main">
               <a:ext uri="{FF2B5EF4-FFF2-40B4-BE49-F238E27FC236}">
-                <a16:creationId xmlns:a16="http://schemas.microsoft.com/office/drawing/2014/main" id="{D1EDA64E-56C9-4F0B-92E3-7B8B99638498}"/>
+                <a16:creationId xmlns:a16="http://schemas.microsoft.com/office/drawing/2014/main" id="{A300E82B-ECDC-405D-99F9-B628D8E4E6DC}"/>
               </a:ext>
             </a:extLst>
           </p:cNvPr>
@@ -2545,7 +2545,7 @@
           <p:cNvPr id="5" name="section-number-02">
             <a:extLst xmlns:a="http://schemas.openxmlformats.org/drawingml/2006/main">
               <a:ext uri="{FF2B5EF4-FFF2-40B4-BE49-F238E27FC236}">
-                <a16:creationId xmlns:a16="http://schemas.microsoft.com/office/drawing/2014/main" id="{E9B0218A-39E7-4971-86D3-6F809632B370}"/>
+                <a16:creationId xmlns:a16="http://schemas.microsoft.com/office/drawing/2014/main" id="{DE088705-6A73-4AC7-B81C-2B7F58D1E290}"/>
               </a:ext>
             </a:extLst>
           </p:cNvPr>
@@ -2585,7 +2585,7 @@
           <p:cNvPr id="6" name="">
             <a:extLst xmlns:a="http://schemas.openxmlformats.org/drawingml/2006/main">
               <a:ext uri="{FF2B5EF4-FFF2-40B4-BE49-F238E27FC236}">
-                <a16:creationId xmlns:a16="http://schemas.microsoft.com/office/drawing/2014/main" id="{C7B0022E-79A8-47EB-8D1C-BDD0F81007C2}"/>
+                <a16:creationId xmlns:a16="http://schemas.microsoft.com/office/drawing/2014/main" id="{E74AB3B4-9A93-49C6-BDFD-AE1E9D6EB4D7}"/>
               </a:ext>
             </a:extLst>
           </p:cNvPr>
@@ -2625,7 +2625,7 @@
           <p:cNvPr id="7" name="">
             <a:extLst xmlns:a="http://schemas.openxmlformats.org/drawingml/2006/main">
               <a:ext uri="{FF2B5EF4-FFF2-40B4-BE49-F238E27FC236}">
-                <a16:creationId xmlns:a16="http://schemas.microsoft.com/office/drawing/2014/main" id="{08CEBA3C-0D98-4A42-AF22-A1E9BC46C12D}"/>
+                <a16:creationId xmlns:a16="http://schemas.microsoft.com/office/drawing/2014/main" id="{E81FA7E7-BFE4-45DF-A946-217F47B0A0B4}"/>
               </a:ext>
             </a:extLst>
           </p:cNvPr>
@@ -2637,7 +2637,7 @@
         <p:spPr>
           <a:xfrm xmlns:a="http://schemas.openxmlformats.org/drawingml/2006/main">
             <a:off x="838200" y="3562350"/>
-            <a:ext cx="8077200" cy="2095500"/>
+            <a:ext cx="8077200" cy="2686050"/>
           </a:xfrm>
           <a:prstGeom xmlns:a="http://schemas.openxmlformats.org/drawingml/2006/main" prst="rect">
             <a:avLst/>
@@ -2730,6 +2730,30 @@
               <a:t>• PostgreSQL как основная БД и SQLite для локального запуска</a:t>
             </a:r>
           </a:p>
+          <a:p xmlns:a="http://schemas.openxmlformats.org/drawingml/2006/main">
+            <a:pPr>
+              <a:defRPr sz="1950" b="0" i="0">
+                <a:solidFill>
+                  <a:srgbClr val="4B6178"/>
+                </a:solidFill>
+              </a:defRPr>
+            </a:pPr>
+            <a:r>
+              <a:t/>
+            </a:r>
+          </a:p>
+          <a:p xmlns:a="http://schemas.openxmlformats.org/drawingml/2006/main">
+            <a:pPr>
+              <a:defRPr sz="1950" b="0" i="0">
+                <a:solidFill>
+                  <a:srgbClr val="4B6178"/>
+                </a:solidFill>
+              </a:defRPr>
+            </a:pPr>
+            <a:r>
+              <a:t>• Ubuntu VPS и systemd для серверного запуска</a:t>
+            </a:r>
+          </a:p>
         </p:txBody>
       </p:sp>
       <p:sp>
@@ -2737,7 +2761,7 @@
           <p:cNvPr id="8" name="">
             <a:extLst xmlns:a="http://schemas.openxmlformats.org/drawingml/2006/main">
               <a:ext uri="{FF2B5EF4-FFF2-40B4-BE49-F238E27FC236}">
-                <a16:creationId xmlns:a16="http://schemas.microsoft.com/office/drawing/2014/main" id="{C089FCA1-E2C5-4F00-AE3C-D0508ABCDF87}"/>
+                <a16:creationId xmlns:a16="http://schemas.microsoft.com/office/drawing/2014/main" id="{B5D80392-AD33-47F9-B388-FA1009C39324}"/>
               </a:ext>
             </a:extLst>
           </p:cNvPr>
@@ -2777,7 +2801,7 @@
           <p:cNvPr id="9" name="">
             <a:extLst xmlns:a="http://schemas.openxmlformats.org/drawingml/2006/main">
               <a:ext uri="{FF2B5EF4-FFF2-40B4-BE49-F238E27FC236}">
-                <a16:creationId xmlns:a16="http://schemas.microsoft.com/office/drawing/2014/main" id="{E95BD057-588C-4221-85EA-BA9A0BD760C5}"/>
+                <a16:creationId xmlns:a16="http://schemas.microsoft.com/office/drawing/2014/main" id="{56328A76-86DC-41B3-B9D3-AFDECFC3787F}"/>
               </a:ext>
             </a:extLst>
           </p:cNvPr>
@@ -2789,7 +2813,7 @@
         <p:spPr>
           <a:xfrm xmlns:a="http://schemas.openxmlformats.org/drawingml/2006/main">
             <a:off x="9372600" y="3562350"/>
-            <a:ext cx="8077200" cy="3276600"/>
+            <a:ext cx="8077200" cy="4171950"/>
           </a:xfrm>
           <a:prstGeom xmlns:a="http://schemas.openxmlformats.org/drawingml/2006/main" prst="rect">
             <a:avLst/>
@@ -2880,6 +2904,30 @@
             </a:pPr>
             <a:r>
               <a:t>• PostgreSQL подходит для большего числа пользователей и серверного деплоя.</a:t>
+            </a:r>
+          </a:p>
+          <a:p xmlns:a="http://schemas.openxmlformats.org/drawingml/2006/main">
+            <a:pPr>
+              <a:defRPr sz="1950" b="0" i="0">
+                <a:solidFill>
+                  <a:srgbClr val="4B6178"/>
+                </a:solidFill>
+              </a:defRPr>
+            </a:pPr>
+            <a:r>
+              <a:t/>
+            </a:r>
+          </a:p>
+          <a:p xmlns:a="http://schemas.openxmlformats.org/drawingml/2006/main">
+            <a:pPr>
+              <a:defRPr sz="1950" b="0" i="0">
+                <a:solidFill>
+                  <a:srgbClr val="4B6178"/>
+                </a:solidFill>
+              </a:defRPr>
+            </a:pPr>
+            <a:r>
+              <a:t>• systemd автоматически поднимает бота после падения процесса или перезагрузки VPS.</a:t>
             </a:r>
           </a:p>
         </p:txBody>
@@ -2887,7 +2935,7 @@
     </p:spTree>
     <p:extLst>
       <p:ext uri="{BB962C8B-B14F-4D97-AF65-F5344CB8AC3E}">
-        <p14:creationId xmlns:p14="http://schemas.microsoft.com/office/powerpoint/2010/main" val="357662673"/>
+        <p14:creationId xmlns:p14="http://schemas.microsoft.com/office/powerpoint/2010/main" val="724502628"/>
       </p:ext>
     </p:extLst>
   </p:cSld>
@@ -2911,7 +2959,7 @@
           <p:cNvPr id="1" name="background">
             <a:extLst xmlns:a="http://schemas.openxmlformats.org/drawingml/2006/main">
               <a:ext uri="{FF2B5EF4-FFF2-40B4-BE49-F238E27FC236}">
-                <a16:creationId xmlns:a16="http://schemas.microsoft.com/office/drawing/2014/main" id="{2A9E6BB0-D777-4683-9E6C-731D68283221}"/>
+                <a16:creationId xmlns:a16="http://schemas.microsoft.com/office/drawing/2014/main" id="{2771288D-87B8-4C88-AA04-F021FA29A9D2}"/>
               </a:ext>
             </a:extLst>
           </p:cNvPr>
@@ -2938,7 +2986,7 @@
           <p:cNvPr id="2" name="slide-title">
             <a:extLst xmlns:a="http://schemas.openxmlformats.org/drawingml/2006/main">
               <a:ext uri="{FF2B5EF4-FFF2-40B4-BE49-F238E27FC236}">
-                <a16:creationId xmlns:a16="http://schemas.microsoft.com/office/drawing/2014/main" id="{08E6F599-6FEC-4331-9307-D5891FB9290F}"/>
+                <a16:creationId xmlns:a16="http://schemas.microsoft.com/office/drawing/2014/main" id="{035DA775-93B4-401E-92AA-00A30E7EBDEB}"/>
               </a:ext>
             </a:extLst>
           </p:cNvPr>
@@ -2978,7 +3026,7 @@
           <p:cNvPr id="3" name="title-rule">
             <a:extLst xmlns:a="http://schemas.openxmlformats.org/drawingml/2006/main">
               <a:ext uri="{FF2B5EF4-FFF2-40B4-BE49-F238E27FC236}">
-                <a16:creationId xmlns:a16="http://schemas.microsoft.com/office/drawing/2014/main" id="{707FD937-1AF4-4330-B908-566EF0184C0B}"/>
+                <a16:creationId xmlns:a16="http://schemas.microsoft.com/office/drawing/2014/main" id="{FABEA9DE-FB22-447C-8D92-501BE42C66C7}"/>
               </a:ext>
             </a:extLst>
           </p:cNvPr>
@@ -3011,7 +3059,7 @@
           <p:cNvPr id="4" name="subtitle">
             <a:extLst xmlns:a="http://schemas.openxmlformats.org/drawingml/2006/main">
               <a:ext uri="{FF2B5EF4-FFF2-40B4-BE49-F238E27FC236}">
-                <a16:creationId xmlns:a16="http://schemas.microsoft.com/office/drawing/2014/main" id="{D74FC892-B5B9-4873-87DE-B11B0594017F}"/>
+                <a16:creationId xmlns:a16="http://schemas.microsoft.com/office/drawing/2014/main" id="{DF95F379-D9ED-49CE-9100-D20161075E77}"/>
               </a:ext>
             </a:extLst>
           </p:cNvPr>
@@ -3051,7 +3099,7 @@
           <p:cNvPr id="5" name="section-number-03">
             <a:extLst xmlns:a="http://schemas.openxmlformats.org/drawingml/2006/main">
               <a:ext uri="{FF2B5EF4-FFF2-40B4-BE49-F238E27FC236}">
-                <a16:creationId xmlns:a16="http://schemas.microsoft.com/office/drawing/2014/main" id="{C8D8BB7F-A2F0-44DC-A01D-E539D12DCF66}"/>
+                <a16:creationId xmlns:a16="http://schemas.microsoft.com/office/drawing/2014/main" id="{0FD39B53-D151-4024-8039-67C82FBDC587}"/>
               </a:ext>
             </a:extLst>
           </p:cNvPr>
@@ -3091,7 +3139,7 @@
           <p:cNvPr id="6" name="">
             <a:extLst xmlns:a="http://schemas.openxmlformats.org/drawingml/2006/main">
               <a:ext uri="{FF2B5EF4-FFF2-40B4-BE49-F238E27FC236}">
-                <a16:creationId xmlns:a16="http://schemas.microsoft.com/office/drawing/2014/main" id="{C2AC6B19-689B-49BB-BC75-793E66D92ACD}"/>
+                <a16:creationId xmlns:a16="http://schemas.microsoft.com/office/drawing/2014/main" id="{A4CEF285-2E6B-4D63-8049-0878219A083C}"/>
               </a:ext>
             </a:extLst>
           </p:cNvPr>
@@ -3131,7 +3179,7 @@
           <p:cNvPr id="7" name="">
             <a:extLst xmlns:a="http://schemas.openxmlformats.org/drawingml/2006/main">
               <a:ext uri="{FF2B5EF4-FFF2-40B4-BE49-F238E27FC236}">
-                <a16:creationId xmlns:a16="http://schemas.microsoft.com/office/drawing/2014/main" id="{DD84CCF1-80C3-46B5-A4A6-5E11474DBAE6}"/>
+                <a16:creationId xmlns:a16="http://schemas.microsoft.com/office/drawing/2014/main" id="{11835618-EF89-48C1-A69A-115B7CBF1F90}"/>
               </a:ext>
             </a:extLst>
           </p:cNvPr>
@@ -3143,7 +3191,7 @@
         <p:spPr>
           <a:xfrm xmlns:a="http://schemas.openxmlformats.org/drawingml/2006/main">
             <a:off x="838200" y="3905250"/>
-            <a:ext cx="7239000" cy="3276600"/>
+            <a:ext cx="7239000" cy="3581400"/>
           </a:xfrm>
           <a:prstGeom xmlns:a="http://schemas.openxmlformats.org/drawingml/2006/main" prst="rect">
             <a:avLst/>
@@ -3257,7 +3305,7 @@
               </a:defRPr>
             </a:pPr>
             <a:r>
-              <a:t>• keyboards/ — главное меню</a:t>
+              <a:t>• keyboards/ — меню, обучение, настройки и тесты</a:t>
             </a:r>
           </a:p>
           <a:p xmlns:a="http://schemas.openxmlformats.org/drawingml/2006/main">
@@ -3281,7 +3329,7 @@
               </a:defRPr>
             </a:pPr>
             <a:r>
-              <a:t>• services/ — регистрация и поиск пользователя</a:t>
+              <a:t>• services/ — обучение, пользователи, настройки и напоминания</a:t>
             </a:r>
           </a:p>
         </p:txBody>
@@ -3291,7 +3339,7 @@
           <p:cNvPr id="8" name="">
             <a:extLst xmlns:a="http://schemas.openxmlformats.org/drawingml/2006/main">
               <a:ext uri="{FF2B5EF4-FFF2-40B4-BE49-F238E27FC236}">
-                <a16:creationId xmlns:a16="http://schemas.microsoft.com/office/drawing/2014/main" id="{F6AD8EE6-9BFF-4624-90CE-016EE1A7F60A}"/>
+                <a16:creationId xmlns:a16="http://schemas.microsoft.com/office/drawing/2014/main" id="{51EFDFEE-EAA9-4259-98ED-6AD311EE4A59}"/>
               </a:ext>
             </a:extLst>
           </p:cNvPr>
@@ -3331,7 +3379,7 @@
           <p:cNvPr id="9" name="">
             <a:extLst xmlns:a="http://schemas.openxmlformats.org/drawingml/2006/main">
               <a:ext uri="{FF2B5EF4-FFF2-40B4-BE49-F238E27FC236}">
-                <a16:creationId xmlns:a16="http://schemas.microsoft.com/office/drawing/2014/main" id="{93755DE5-AB6B-460E-84B0-796ECA606153}"/>
+                <a16:creationId xmlns:a16="http://schemas.microsoft.com/office/drawing/2014/main" id="{3F58DB67-665A-468D-BA08-5A23091DB513}"/>
               </a:ext>
             </a:extLst>
           </p:cNvPr>
@@ -3371,7 +3419,7 @@
           <p:cNvPr id="10" name="">
             <a:extLst xmlns:a="http://schemas.openxmlformats.org/drawingml/2006/main">
               <a:ext uri="{FF2B5EF4-FFF2-40B4-BE49-F238E27FC236}">
-                <a16:creationId xmlns:a16="http://schemas.microsoft.com/office/drawing/2014/main" id="{F605C181-B262-48CA-B322-0945A1E77AB9}"/>
+                <a16:creationId xmlns:a16="http://schemas.microsoft.com/office/drawing/2014/main" id="{C9652225-5F21-4811-911B-B7B6740A1ABF}"/>
               </a:ext>
             </a:extLst>
           </p:cNvPr>
@@ -3411,7 +3459,7 @@
           <p:cNvPr id="11" name="">
             <a:extLst xmlns:a="http://schemas.openxmlformats.org/drawingml/2006/main">
               <a:ext uri="{FF2B5EF4-FFF2-40B4-BE49-F238E27FC236}">
-                <a16:creationId xmlns:a16="http://schemas.microsoft.com/office/drawing/2014/main" id="{462AE64F-EE8A-4BF2-8ADC-7733D565E850}"/>
+                <a16:creationId xmlns:a16="http://schemas.microsoft.com/office/drawing/2014/main" id="{D31E2B6A-DA4F-45DC-B3CA-F9159B352BA3}"/>
               </a:ext>
             </a:extLst>
           </p:cNvPr>
@@ -3451,7 +3499,7 @@
           <p:cNvPr id="12" name="">
             <a:extLst xmlns:a="http://schemas.openxmlformats.org/drawingml/2006/main">
               <a:ext uri="{FF2B5EF4-FFF2-40B4-BE49-F238E27FC236}">
-                <a16:creationId xmlns:a16="http://schemas.microsoft.com/office/drawing/2014/main" id="{C7B74666-1854-47B9-A134-787D7BC76572}"/>
+                <a16:creationId xmlns:a16="http://schemas.microsoft.com/office/drawing/2014/main" id="{642C959B-0D29-4431-9074-8D1849FFEBB0}"/>
               </a:ext>
             </a:extLst>
           </p:cNvPr>
@@ -3481,7 +3529,7 @@
               </a:defRPr>
             </a:pPr>
             <a:r>
-              <a:t>4. После регистрации пользователю отправляется приветствие и отображается меню разделов.</a:t>
+              <a:t>4. При первой регистрации пользователь выбирает язык обучения, после чего открывается главное меню.</a:t>
             </a:r>
           </a:p>
         </p:txBody>
@@ -3489,7 +3537,7 @@
     </p:spTree>
     <p:extLst>
       <p:ext uri="{BB962C8B-B14F-4D97-AF65-F5344CB8AC3E}">
-        <p14:creationId xmlns:p14="http://schemas.microsoft.com/office/powerpoint/2010/main" val="1650311051"/>
+        <p14:creationId xmlns:p14="http://schemas.microsoft.com/office/powerpoint/2010/main" val="1119906022"/>
       </p:ext>
     </p:extLst>
   </p:cSld>
@@ -3513,7 +3561,7 @@
           <p:cNvPr id="1" name="background">
             <a:extLst xmlns:a="http://schemas.openxmlformats.org/drawingml/2006/main">
               <a:ext uri="{FF2B5EF4-FFF2-40B4-BE49-F238E27FC236}">
-                <a16:creationId xmlns:a16="http://schemas.microsoft.com/office/drawing/2014/main" id="{0DA9D208-C27A-479E-8E46-9D71FAE28681}"/>
+                <a16:creationId xmlns:a16="http://schemas.microsoft.com/office/drawing/2014/main" id="{8E051FD8-B055-4371-8E5B-621BF5DCA170}"/>
               </a:ext>
             </a:extLst>
           </p:cNvPr>
@@ -3540,7 +3588,7 @@
           <p:cNvPr id="2" name="slide-title">
             <a:extLst xmlns:a="http://schemas.openxmlformats.org/drawingml/2006/main">
               <a:ext uri="{FF2B5EF4-FFF2-40B4-BE49-F238E27FC236}">
-                <a16:creationId xmlns:a16="http://schemas.microsoft.com/office/drawing/2014/main" id="{1922BD54-4103-4AC0-98E5-0475FB95D7D5}"/>
+                <a16:creationId xmlns:a16="http://schemas.microsoft.com/office/drawing/2014/main" id="{3CBF4ACD-CB53-44B6-9498-C68493DA5E79}"/>
               </a:ext>
             </a:extLst>
           </p:cNvPr>
@@ -3580,7 +3628,7 @@
           <p:cNvPr id="3" name="title-rule">
             <a:extLst xmlns:a="http://schemas.openxmlformats.org/drawingml/2006/main">
               <a:ext uri="{FF2B5EF4-FFF2-40B4-BE49-F238E27FC236}">
-                <a16:creationId xmlns:a16="http://schemas.microsoft.com/office/drawing/2014/main" id="{B1F1A3BA-ED1A-4EAA-8729-39989C7CA157}"/>
+                <a16:creationId xmlns:a16="http://schemas.microsoft.com/office/drawing/2014/main" id="{8D19EFE2-66C7-4FCF-818A-9C8B89767671}"/>
               </a:ext>
             </a:extLst>
           </p:cNvPr>
@@ -3613,7 +3661,7 @@
           <p:cNvPr id="4" name="subtitle">
             <a:extLst xmlns:a="http://schemas.openxmlformats.org/drawingml/2006/main">
               <a:ext uri="{FF2B5EF4-FFF2-40B4-BE49-F238E27FC236}">
-                <a16:creationId xmlns:a16="http://schemas.microsoft.com/office/drawing/2014/main" id="{34C6DD02-475F-45C1-9FDC-89B6B2DA93F1}"/>
+                <a16:creationId xmlns:a16="http://schemas.microsoft.com/office/drawing/2014/main" id="{887D1E7A-3477-4E69-AEEA-A8491A25E455}"/>
               </a:ext>
             </a:extLst>
           </p:cNvPr>
@@ -3653,7 +3701,7 @@
           <p:cNvPr id="5" name="section-number-04">
             <a:extLst xmlns:a="http://schemas.openxmlformats.org/drawingml/2006/main">
               <a:ext uri="{FF2B5EF4-FFF2-40B4-BE49-F238E27FC236}">
-                <a16:creationId xmlns:a16="http://schemas.microsoft.com/office/drawing/2014/main" id="{9A613B8B-84E9-4814-BB88-45BCEF0965F2}"/>
+                <a16:creationId xmlns:a16="http://schemas.microsoft.com/office/drawing/2014/main" id="{AD5C9D03-523A-4E22-A348-BE12FCE0882D}"/>
               </a:ext>
             </a:extLst>
           </p:cNvPr>
@@ -3693,7 +3741,7 @@
           <p:cNvPr id="6" name="">
             <a:extLst xmlns:a="http://schemas.openxmlformats.org/drawingml/2006/main">
               <a:ext uri="{FF2B5EF4-FFF2-40B4-BE49-F238E27FC236}">
-                <a16:creationId xmlns:a16="http://schemas.microsoft.com/office/drawing/2014/main" id="{65183C44-82C4-4047-AAAF-AEBE9119FB32}"/>
+                <a16:creationId xmlns:a16="http://schemas.microsoft.com/office/drawing/2014/main" id="{D0DBB23E-2840-4B56-8CEC-7977CC02681F}"/>
               </a:ext>
             </a:extLst>
           </p:cNvPr>
@@ -3733,7 +3781,7 @@
           <p:cNvPr id="7" name="">
             <a:extLst xmlns:a="http://schemas.openxmlformats.org/drawingml/2006/main">
               <a:ext uri="{FF2B5EF4-FFF2-40B4-BE49-F238E27FC236}">
-                <a16:creationId xmlns:a16="http://schemas.microsoft.com/office/drawing/2014/main" id="{B708A3BC-AF65-40F0-8003-6AC592E8355A}"/>
+                <a16:creationId xmlns:a16="http://schemas.microsoft.com/office/drawing/2014/main" id="{D6370EE5-8D64-4DA4-B51C-879C477E452F}"/>
               </a:ext>
             </a:extLst>
           </p:cNvPr>
@@ -3763,7 +3811,7 @@
               </a:defRPr>
             </a:pPr>
             <a:r>
-              <a:t>• users — профиль пользователя, уровень и настройки</a:t>
+              <a:t>• users — профиль, текущий язык, уровень и настройки</a:t>
             </a:r>
           </a:p>
           <a:p xmlns:a="http://schemas.openxmlformats.org/drawingml/2006/main">
@@ -3787,7 +3835,7 @@
               </a:defRPr>
             </a:pPr>
             <a:r>
-              <a:t>• word_sets — учебные темы и служебные типы тестов</a:t>
+              <a:t>• word_sets — учебные темы, язык и служебные типы тестов</a:t>
             </a:r>
           </a:p>
           <a:p xmlns:a="http://schemas.openxmlformats.org/drawingml/2006/main">
@@ -3893,7 +3941,7 @@
           <p:cNvPr id="8" name="">
             <a:extLst xmlns:a="http://schemas.openxmlformats.org/drawingml/2006/main">
               <a:ext uri="{FF2B5EF4-FFF2-40B4-BE49-F238E27FC236}">
-                <a16:creationId xmlns:a16="http://schemas.microsoft.com/office/drawing/2014/main" id="{09B077DF-145E-4E22-8492-0CCF46F9D0EC}"/>
+                <a16:creationId xmlns:a16="http://schemas.microsoft.com/office/drawing/2014/main" id="{831ED32C-CE40-42B1-9068-C99B6C80F923}"/>
               </a:ext>
             </a:extLst>
           </p:cNvPr>
@@ -3933,7 +3981,7 @@
           <p:cNvPr id="9" name="">
             <a:extLst xmlns:a="http://schemas.openxmlformats.org/drawingml/2006/main">
               <a:ext uri="{FF2B5EF4-FFF2-40B4-BE49-F238E27FC236}">
-                <a16:creationId xmlns:a16="http://schemas.microsoft.com/office/drawing/2014/main" id="{2E0901F9-312C-45B9-A784-F43BE7FE478D}"/>
+                <a16:creationId xmlns:a16="http://schemas.microsoft.com/office/drawing/2014/main" id="{C5689F36-2DB9-41BB-8C8B-A3A884FB1CE9}"/>
               </a:ext>
             </a:extLst>
           </p:cNvPr>
@@ -3945,7 +3993,7 @@
         <p:spPr>
           <a:xfrm xmlns:a="http://schemas.openxmlformats.org/drawingml/2006/main">
             <a:off x="9391650" y="3524250"/>
-            <a:ext cx="8058150" cy="2971800"/>
+            <a:ext cx="8058150" cy="3276600"/>
           </a:xfrm>
           <a:prstGeom xmlns:a="http://schemas.openxmlformats.org/drawingml/2006/main" prst="rect">
             <a:avLst/>
@@ -3987,7 +4035,7 @@
               </a:defRPr>
             </a:pPr>
             <a:r>
-              <a:t>• Основа для последующей персонализации сценариев обучения.</a:t>
+              <a:t>• Разделение словаря и прогресса по текущему языку пользователя.</a:t>
             </a:r>
           </a:p>
           <a:p xmlns:a="http://schemas.openxmlformats.org/drawingml/2006/main">
@@ -4011,7 +4059,7 @@
               </a:defRPr>
             </a:pPr>
             <a:r>
-              <a:t>• Хранение учебных тем, карточек, словаря, прогресса и попыток тестов.</a:t>
+              <a:t>• Хранение учебных тем, карточек, словаря, слабых слов и попыток тестов.</a:t>
             </a:r>
           </a:p>
           <a:p xmlns:a="http://schemas.openxmlformats.org/drawingml/2006/main">
@@ -4035,7 +4083,7 @@
               </a:defRPr>
             </a:pPr>
             <a:r>
-              <a:t>• Поддержка PostgreSQL для дальнейшего деплоя и SQLite для локальной демонстрации.</a:t>
+              <a:t>• PostgreSQL используется на сервере, SQLite сохранен как локальный fallback.</a:t>
             </a:r>
           </a:p>
         </p:txBody>
@@ -4043,7 +4091,7 @@
     </p:spTree>
     <p:extLst>
       <p:ext uri="{BB962C8B-B14F-4D97-AF65-F5344CB8AC3E}">
-        <p14:creationId xmlns:p14="http://schemas.microsoft.com/office/powerpoint/2010/main" val="1554942550"/>
+        <p14:creationId xmlns:p14="http://schemas.microsoft.com/office/powerpoint/2010/main" val="1122315605"/>
       </p:ext>
     </p:extLst>
   </p:cSld>
@@ -4067,7 +4115,7 @@
           <p:cNvPr id="1" name="background">
             <a:extLst xmlns:a="http://schemas.openxmlformats.org/drawingml/2006/main">
               <a:ext uri="{FF2B5EF4-FFF2-40B4-BE49-F238E27FC236}">
-                <a16:creationId xmlns:a16="http://schemas.microsoft.com/office/drawing/2014/main" id="{8BC1F56B-C9B3-44C8-B234-66EB4904DE3B}"/>
+                <a16:creationId xmlns:a16="http://schemas.microsoft.com/office/drawing/2014/main" id="{9152E291-4DD3-4600-AB7D-5D27EBCD85ED}"/>
               </a:ext>
             </a:extLst>
           </p:cNvPr>
@@ -4094,7 +4142,7 @@
           <p:cNvPr id="2" name="slide-title">
             <a:extLst xmlns:a="http://schemas.openxmlformats.org/drawingml/2006/main">
               <a:ext uri="{FF2B5EF4-FFF2-40B4-BE49-F238E27FC236}">
-                <a16:creationId xmlns:a16="http://schemas.microsoft.com/office/drawing/2014/main" id="{2F827BBC-55CB-4F06-8531-5C99C8F6CB76}"/>
+                <a16:creationId xmlns:a16="http://schemas.microsoft.com/office/drawing/2014/main" id="{08C46065-9F58-4220-9262-3AB75D2ED852}"/>
               </a:ext>
             </a:extLst>
           </p:cNvPr>
@@ -4134,7 +4182,7 @@
           <p:cNvPr id="3" name="title-rule">
             <a:extLst xmlns:a="http://schemas.openxmlformats.org/drawingml/2006/main">
               <a:ext uri="{FF2B5EF4-FFF2-40B4-BE49-F238E27FC236}">
-                <a16:creationId xmlns:a16="http://schemas.microsoft.com/office/drawing/2014/main" id="{54B0C038-AB79-441F-BAE5-E5D07C2F9C75}"/>
+                <a16:creationId xmlns:a16="http://schemas.microsoft.com/office/drawing/2014/main" id="{EA4E76A8-9806-4104-B04A-E2212CC21885}"/>
               </a:ext>
             </a:extLst>
           </p:cNvPr>
@@ -4167,7 +4215,7 @@
           <p:cNvPr id="4" name="subtitle">
             <a:extLst xmlns:a="http://schemas.openxmlformats.org/drawingml/2006/main">
               <a:ext uri="{FF2B5EF4-FFF2-40B4-BE49-F238E27FC236}">
-                <a16:creationId xmlns:a16="http://schemas.microsoft.com/office/drawing/2014/main" id="{7CEC3FA1-78DB-4938-B330-5505FB24B84B}"/>
+                <a16:creationId xmlns:a16="http://schemas.microsoft.com/office/drawing/2014/main" id="{376B84BE-8033-498D-9B8C-C50CD4A1F862}"/>
               </a:ext>
             </a:extLst>
           </p:cNvPr>
@@ -4207,7 +4255,7 @@
           <p:cNvPr id="5" name="section-number-05">
             <a:extLst xmlns:a="http://schemas.openxmlformats.org/drawingml/2006/main">
               <a:ext uri="{FF2B5EF4-FFF2-40B4-BE49-F238E27FC236}">
-                <a16:creationId xmlns:a16="http://schemas.microsoft.com/office/drawing/2014/main" id="{E9C149D4-DB4D-4C1A-AA65-C4DE79E42C0A}"/>
+                <a16:creationId xmlns:a16="http://schemas.microsoft.com/office/drawing/2014/main" id="{80645A7C-4D8F-4B78-858A-4E7E3F684BAF}"/>
               </a:ext>
             </a:extLst>
           </p:cNvPr>
@@ -4247,7 +4295,7 @@
           <p:cNvPr id="6" name="">
             <a:extLst xmlns:a="http://schemas.openxmlformats.org/drawingml/2006/main">
               <a:ext uri="{FF2B5EF4-FFF2-40B4-BE49-F238E27FC236}">
-                <a16:creationId xmlns:a16="http://schemas.microsoft.com/office/drawing/2014/main" id="{9085D1E9-C82A-4912-B122-58148B45B76C}"/>
+                <a16:creationId xmlns:a16="http://schemas.microsoft.com/office/drawing/2014/main" id="{7DDCC03A-6112-4238-B014-FC8961CB66D7}"/>
               </a:ext>
             </a:extLst>
           </p:cNvPr>
@@ -4287,7 +4335,7 @@
           <p:cNvPr id="7" name="">
             <a:extLst xmlns:a="http://schemas.openxmlformats.org/drawingml/2006/main">
               <a:ext uri="{FF2B5EF4-FFF2-40B4-BE49-F238E27FC236}">
-                <a16:creationId xmlns:a16="http://schemas.microsoft.com/office/drawing/2014/main" id="{C2507D6D-218A-46AC-9B8E-A0F29428741C}"/>
+                <a16:creationId xmlns:a16="http://schemas.microsoft.com/office/drawing/2014/main" id="{31592EA1-8BAA-47B2-8222-1400CF0659ED}"/>
               </a:ext>
             </a:extLst>
           </p:cNvPr>
@@ -4299,7 +4347,7 @@
         <p:spPr>
           <a:xfrm xmlns:a="http://schemas.openxmlformats.org/drawingml/2006/main">
             <a:off x="838200" y="4533900"/>
-            <a:ext cx="6667500" cy="647700"/>
+            <a:ext cx="6953250" cy="647700"/>
           </a:xfrm>
           <a:prstGeom xmlns:a="http://schemas.openxmlformats.org/drawingml/2006/main" prst="rect">
             <a:avLst/>
@@ -4317,7 +4365,7 @@
               </a:defRPr>
             </a:pPr>
             <a:r>
-              <a:t>Открытие бота → /start → проверка пользователя → регистрация → приветствие → главное меню</a:t>
+              <a:t>Открытие бота → /start → регистрация → выбор языка → главное меню → уроки и тренировки</a:t>
             </a:r>
           </a:p>
         </p:txBody>
@@ -4327,7 +4375,7 @@
           <p:cNvPr id="8" name="">
             <a:extLst xmlns:a="http://schemas.openxmlformats.org/drawingml/2006/main">
               <a:ext uri="{FF2B5EF4-FFF2-40B4-BE49-F238E27FC236}">
-                <a16:creationId xmlns:a16="http://schemas.microsoft.com/office/drawing/2014/main" id="{FD0DF41F-65A0-4A38-8EA2-7A6828A4BF09}"/>
+                <a16:creationId xmlns:a16="http://schemas.microsoft.com/office/drawing/2014/main" id="{9BC5503F-A7A0-467E-8E4B-C9A4452B8219}"/>
               </a:ext>
             </a:extLst>
           </p:cNvPr>
@@ -4360,7 +4408,7 @@
           <p:cNvPr id="9" name="">
             <a:extLst xmlns:a="http://schemas.openxmlformats.org/drawingml/2006/main">
               <a:ext uri="{FF2B5EF4-FFF2-40B4-BE49-F238E27FC236}">
-                <a16:creationId xmlns:a16="http://schemas.microsoft.com/office/drawing/2014/main" id="{6ED9DF2C-7A4A-4852-AB4C-B37C38D460CD}"/>
+                <a16:creationId xmlns:a16="http://schemas.microsoft.com/office/drawing/2014/main" id="{E4698734-6F17-4258-96E7-D225840C6259}"/>
               </a:ext>
             </a:extLst>
           </p:cNvPr>
@@ -4400,7 +4448,7 @@
           <p:cNvPr id="10" name="">
             <a:extLst xmlns:a="http://schemas.openxmlformats.org/drawingml/2006/main">
               <a:ext uri="{FF2B5EF4-FFF2-40B4-BE49-F238E27FC236}">
-                <a16:creationId xmlns:a16="http://schemas.microsoft.com/office/drawing/2014/main" id="{5D45C4DA-ACA9-4307-AA5F-192545C892B0}"/>
+                <a16:creationId xmlns:a16="http://schemas.microsoft.com/office/drawing/2014/main" id="{5791DC63-D761-435B-AF6D-B07253EDE121}"/>
               </a:ext>
             </a:extLst>
           </p:cNvPr>
@@ -4560,7 +4608,7 @@
           <p:cNvPr id="11" name="">
             <a:extLst xmlns:a="http://schemas.openxmlformats.org/drawingml/2006/main">
               <a:ext uri="{FF2B5EF4-FFF2-40B4-BE49-F238E27FC236}">
-                <a16:creationId xmlns:a16="http://schemas.microsoft.com/office/drawing/2014/main" id="{9CBCF049-945A-451D-BC04-17CBEBA9664F}"/>
+                <a16:creationId xmlns:a16="http://schemas.microsoft.com/office/drawing/2014/main" id="{26D7B473-0924-49F9-8FC2-350C193E5597}"/>
               </a:ext>
             </a:extLst>
           </p:cNvPr>
@@ -4600,7 +4648,7 @@
           <p:cNvPr id="12" name="">
             <a:extLst xmlns:a="http://schemas.openxmlformats.org/drawingml/2006/main">
               <a:ext uri="{FF2B5EF4-FFF2-40B4-BE49-F238E27FC236}">
-                <a16:creationId xmlns:a16="http://schemas.microsoft.com/office/drawing/2014/main" id="{CD49A794-8CBD-495F-BBC4-A4B6839CC702}"/>
+                <a16:creationId xmlns:a16="http://schemas.microsoft.com/office/drawing/2014/main" id="{9D693235-2E30-490F-812B-4379EC78568D}"/>
               </a:ext>
             </a:extLst>
           </p:cNvPr>
@@ -4726,7 +4774,7 @@
               </a:defRPr>
             </a:pPr>
             <a:r>
-              <a:t>• Выбор уровня и настройка напоминаний.</a:t>
+              <a:t>• Выбор языка, выбор уровня и настройка напоминаний.</a:t>
             </a:r>
           </a:p>
           <a:p xmlns:a="http://schemas.openxmlformats.org/drawingml/2006/main">
@@ -4758,7 +4806,7 @@
     </p:spTree>
     <p:extLst>
       <p:ext uri="{BB962C8B-B14F-4D97-AF65-F5344CB8AC3E}">
-        <p14:creationId xmlns:p14="http://schemas.microsoft.com/office/powerpoint/2010/main" val="839068441"/>
+        <p14:creationId xmlns:p14="http://schemas.microsoft.com/office/powerpoint/2010/main" val="1072717183"/>
       </p:ext>
     </p:extLst>
   </p:cSld>
@@ -4782,7 +4830,7 @@
           <p:cNvPr id="1" name="background">
             <a:extLst xmlns:a="http://schemas.openxmlformats.org/drawingml/2006/main">
               <a:ext uri="{FF2B5EF4-FFF2-40B4-BE49-F238E27FC236}">
-                <a16:creationId xmlns:a16="http://schemas.microsoft.com/office/drawing/2014/main" id="{6C8DCC1F-F275-48A7-A69C-5850CD297DED}"/>
+                <a16:creationId xmlns:a16="http://schemas.microsoft.com/office/drawing/2014/main" id="{FE87AF78-790B-44B3-B483-3489E887A292}"/>
               </a:ext>
             </a:extLst>
           </p:cNvPr>
@@ -4809,7 +4857,7 @@
           <p:cNvPr id="2" name="slide-title">
             <a:extLst xmlns:a="http://schemas.openxmlformats.org/drawingml/2006/main">
               <a:ext uri="{FF2B5EF4-FFF2-40B4-BE49-F238E27FC236}">
-                <a16:creationId xmlns:a16="http://schemas.microsoft.com/office/drawing/2014/main" id="{DA733524-0745-44C9-8C55-836B69F74E8E}"/>
+                <a16:creationId xmlns:a16="http://schemas.microsoft.com/office/drawing/2014/main" id="{9DA145C9-B0F9-42A6-9C13-409019DF6A62}"/>
               </a:ext>
             </a:extLst>
           </p:cNvPr>
@@ -4849,7 +4897,7 @@
           <p:cNvPr id="3" name="title-rule">
             <a:extLst xmlns:a="http://schemas.openxmlformats.org/drawingml/2006/main">
               <a:ext uri="{FF2B5EF4-FFF2-40B4-BE49-F238E27FC236}">
-                <a16:creationId xmlns:a16="http://schemas.microsoft.com/office/drawing/2014/main" id="{E5C41776-915D-4121-BC6C-564D41673817}"/>
+                <a16:creationId xmlns:a16="http://schemas.microsoft.com/office/drawing/2014/main" id="{21D2C1CB-A023-435A-95C8-19ED8938EC6A}"/>
               </a:ext>
             </a:extLst>
           </p:cNvPr>
@@ -4882,7 +4930,7 @@
           <p:cNvPr id="4" name="subtitle">
             <a:extLst xmlns:a="http://schemas.openxmlformats.org/drawingml/2006/main">
               <a:ext uri="{FF2B5EF4-FFF2-40B4-BE49-F238E27FC236}">
-                <a16:creationId xmlns:a16="http://schemas.microsoft.com/office/drawing/2014/main" id="{AADD45C7-676A-425B-BD94-A9D938B12C77}"/>
+                <a16:creationId xmlns:a16="http://schemas.microsoft.com/office/drawing/2014/main" id="{6E68396E-79BC-4451-8F0A-34F63E2FFB21}"/>
               </a:ext>
             </a:extLst>
           </p:cNvPr>
@@ -4922,7 +4970,7 @@
           <p:cNvPr id="5" name="section-number-06">
             <a:extLst xmlns:a="http://schemas.openxmlformats.org/drawingml/2006/main">
               <a:ext uri="{FF2B5EF4-FFF2-40B4-BE49-F238E27FC236}">
-                <a16:creationId xmlns:a16="http://schemas.microsoft.com/office/drawing/2014/main" id="{97A992A5-2B57-44FD-8F7F-7824C298FB5B}"/>
+                <a16:creationId xmlns:a16="http://schemas.microsoft.com/office/drawing/2014/main" id="{063CE159-31F1-4259-BD51-61E265FB3BDE}"/>
               </a:ext>
             </a:extLst>
           </p:cNvPr>
@@ -4962,7 +5010,7 @@
           <p:cNvPr id="6" name="">
             <a:extLst xmlns:a="http://schemas.openxmlformats.org/drawingml/2006/main">
               <a:ext uri="{FF2B5EF4-FFF2-40B4-BE49-F238E27FC236}">
-                <a16:creationId xmlns:a16="http://schemas.microsoft.com/office/drawing/2014/main" id="{945484F9-1FCC-4111-A80A-5C12F493BA09}"/>
+                <a16:creationId xmlns:a16="http://schemas.microsoft.com/office/drawing/2014/main" id="{6571AD36-3D40-452D-A0FD-E7239EB6F7F4}"/>
               </a:ext>
             </a:extLst>
           </p:cNvPr>
@@ -5002,7 +5050,7 @@
           <p:cNvPr id="7" name="">
             <a:extLst xmlns:a="http://schemas.openxmlformats.org/drawingml/2006/main">
               <a:ext uri="{FF2B5EF4-FFF2-40B4-BE49-F238E27FC236}">
-                <a16:creationId xmlns:a16="http://schemas.microsoft.com/office/drawing/2014/main" id="{C3F09576-22B3-4287-9A69-BAD9F113AAC2}"/>
+                <a16:creationId xmlns:a16="http://schemas.microsoft.com/office/drawing/2014/main" id="{215B0F39-1899-49D4-B80B-B8381DB5392E}"/>
               </a:ext>
             </a:extLst>
           </p:cNvPr>
@@ -5014,7 +5062,7 @@
         <p:spPr>
           <a:xfrm xmlns:a="http://schemas.openxmlformats.org/drawingml/2006/main">
             <a:off x="838200" y="3524250"/>
-            <a:ext cx="8077200" cy="2686050"/>
+            <a:ext cx="8077200" cy="3276600"/>
           </a:xfrm>
           <a:prstGeom xmlns:a="http://schemas.openxmlformats.org/drawingml/2006/main" prst="rect">
             <a:avLst/>
@@ -5032,7 +5080,7 @@
               </a:defRPr>
             </a:pPr>
             <a:r>
-              <a:t>• 45 учебных тем и 396 карточек с примерами.</a:t>
+              <a:t>• 3 языка: английский, испанский и итальянский.</a:t>
             </a:r>
           </a:p>
           <a:p xmlns:a="http://schemas.openxmlformats.org/drawingml/2006/main">
@@ -5056,6 +5104,30 @@
               </a:defRPr>
             </a:pPr>
             <a:r>
+              <a:t>• По 45 учебных тем и 396 карточек с примерами на каждый язык.</a:t>
+            </a:r>
+          </a:p>
+          <a:p xmlns:a="http://schemas.openxmlformats.org/drawingml/2006/main">
+            <a:pPr>
+              <a:defRPr sz="1950" b="0" i="0">
+                <a:solidFill>
+                  <a:srgbClr val="4B6178"/>
+                </a:solidFill>
+              </a:defRPr>
+            </a:pPr>
+            <a:r>
+              <a:t/>
+            </a:r>
+          </a:p>
+          <a:p xmlns:a="http://schemas.openxmlformats.org/drawingml/2006/main">
+            <a:pPr>
+              <a:defRPr sz="1950" b="0" i="0">
+                <a:solidFill>
+                  <a:srgbClr val="4B6178"/>
+                </a:solidFill>
+              </a:defRPr>
+            </a:pPr>
+            <a:r>
               <a:t>• Регистрация пользователя и хранение профиля в БД.</a:t>
             </a:r>
           </a:p>
@@ -5138,7 +5210,7 @@
           <p:cNvPr id="8" name="">
             <a:extLst xmlns:a="http://schemas.openxmlformats.org/drawingml/2006/main">
               <a:ext uri="{FF2B5EF4-FFF2-40B4-BE49-F238E27FC236}">
-                <a16:creationId xmlns:a16="http://schemas.microsoft.com/office/drawing/2014/main" id="{C12005B5-4520-4B4B-941C-235C7EE61ADD}"/>
+                <a16:creationId xmlns:a16="http://schemas.microsoft.com/office/drawing/2014/main" id="{65DC111E-C468-49E6-BF8B-47AA1977F169}"/>
               </a:ext>
             </a:extLst>
           </p:cNvPr>
@@ -5178,7 +5250,7 @@
           <p:cNvPr id="9" name="">
             <a:extLst xmlns:a="http://schemas.openxmlformats.org/drawingml/2006/main">
               <a:ext uri="{FF2B5EF4-FFF2-40B4-BE49-F238E27FC236}">
-                <a16:creationId xmlns:a16="http://schemas.microsoft.com/office/drawing/2014/main" id="{5F8C4B4A-CDA2-4A09-AFBE-C387A924CE41}"/>
+                <a16:creationId xmlns:a16="http://schemas.microsoft.com/office/drawing/2014/main" id="{CEF259D0-2E57-4584-BAD3-DB6E6D582DB0}"/>
               </a:ext>
             </a:extLst>
           </p:cNvPr>
@@ -5190,7 +5262,7 @@
         <p:spPr>
           <a:xfrm xmlns:a="http://schemas.openxmlformats.org/drawingml/2006/main">
             <a:off x="9372600" y="3524250"/>
-            <a:ext cx="8077200" cy="2095500"/>
+            <a:ext cx="8077200" cy="2686050"/>
           </a:xfrm>
           <a:prstGeom xmlns:a="http://schemas.openxmlformats.org/drawingml/2006/main" prst="rect">
             <a:avLst/>
@@ -5232,7 +5304,7 @@
               </a:defRPr>
             </a:pPr>
             <a:r>
-              <a:t>• Настройки уровня и напоминаний.</a:t>
+              <a:t>• Настройки языка, уровня и напоминаний.</a:t>
             </a:r>
           </a:p>
           <a:p xmlns:a="http://schemas.openxmlformats.org/drawingml/2006/main">
@@ -5256,7 +5328,7 @@
               </a:defRPr>
             </a:pPr>
             <a:r>
-              <a:t>• Поддержка PostgreSQL и локального SQLite fallback.</a:t>
+              <a:t>• PostgreSQL на VPS и локальный SQLite fallback.</a:t>
             </a:r>
           </a:p>
           <a:p xmlns:a="http://schemas.openxmlformats.org/drawingml/2006/main">
@@ -5281,6 +5353,30 @@
             </a:pPr>
             <a:r>
               <a:t>• Обработка текстовых сообщений и устаревших кнопок.</a:t>
+            </a:r>
+          </a:p>
+          <a:p xmlns:a="http://schemas.openxmlformats.org/drawingml/2006/main">
+            <a:pPr>
+              <a:defRPr sz="1950" b="0" i="0">
+                <a:solidFill>
+                  <a:srgbClr val="4B6178"/>
+                </a:solidFill>
+              </a:defRPr>
+            </a:pPr>
+            <a:r>
+              <a:t/>
+            </a:r>
+          </a:p>
+          <a:p xmlns:a="http://schemas.openxmlformats.org/drawingml/2006/main">
+            <a:pPr>
+              <a:defRPr sz="1950" b="0" i="0">
+                <a:solidFill>
+                  <a:srgbClr val="4B6178"/>
+                </a:solidFill>
+              </a:defRPr>
+            </a:pPr>
+            <a:r>
+              <a:t>• Разделение прогресса и словаря при смене языка.</a:t>
             </a:r>
           </a:p>
         </p:txBody>
@@ -5288,7 +5384,7 @@
     </p:spTree>
     <p:extLst>
       <p:ext uri="{BB962C8B-B14F-4D97-AF65-F5344CB8AC3E}">
-        <p14:creationId xmlns:p14="http://schemas.microsoft.com/office/powerpoint/2010/main" val="1424344691"/>
+        <p14:creationId xmlns:p14="http://schemas.microsoft.com/office/powerpoint/2010/main" val="524169156"/>
       </p:ext>
     </p:extLst>
   </p:cSld>
@@ -5312,7 +5408,7 @@
           <p:cNvPr id="1" name="background">
             <a:extLst xmlns:a="http://schemas.openxmlformats.org/drawingml/2006/main">
               <a:ext uri="{FF2B5EF4-FFF2-40B4-BE49-F238E27FC236}">
-                <a16:creationId xmlns:a16="http://schemas.microsoft.com/office/drawing/2014/main" id="{A4142A26-B9D5-4383-9B9F-3E3EB7458062}"/>
+                <a16:creationId xmlns:a16="http://schemas.microsoft.com/office/drawing/2014/main" id="{335FCC21-B1FD-4E33-8E86-BC00E72E5468}"/>
               </a:ext>
             </a:extLst>
           </p:cNvPr>
@@ -5339,7 +5435,7 @@
           <p:cNvPr id="2" name="slide-title">
             <a:extLst xmlns:a="http://schemas.openxmlformats.org/drawingml/2006/main">
               <a:ext uri="{FF2B5EF4-FFF2-40B4-BE49-F238E27FC236}">
-                <a16:creationId xmlns:a16="http://schemas.microsoft.com/office/drawing/2014/main" id="{8F6BDC9F-42F2-498D-BC08-617FB2D478EB}"/>
+                <a16:creationId xmlns:a16="http://schemas.microsoft.com/office/drawing/2014/main" id="{85FF175E-A2B4-4084-AEBB-D61A78BD410A}"/>
               </a:ext>
             </a:extLst>
           </p:cNvPr>
@@ -5379,7 +5475,7 @@
           <p:cNvPr id="3" name="title-rule">
             <a:extLst xmlns:a="http://schemas.openxmlformats.org/drawingml/2006/main">
               <a:ext uri="{FF2B5EF4-FFF2-40B4-BE49-F238E27FC236}">
-                <a16:creationId xmlns:a16="http://schemas.microsoft.com/office/drawing/2014/main" id="{45777162-E3C6-4B75-9817-0564B15D2924}"/>
+                <a16:creationId xmlns:a16="http://schemas.microsoft.com/office/drawing/2014/main" id="{35E81B1E-A87A-495C-8710-6BA04A4FF6E0}"/>
               </a:ext>
             </a:extLst>
           </p:cNvPr>
@@ -5412,7 +5508,7 @@
           <p:cNvPr id="4" name="subtitle">
             <a:extLst xmlns:a="http://schemas.openxmlformats.org/drawingml/2006/main">
               <a:ext uri="{FF2B5EF4-FFF2-40B4-BE49-F238E27FC236}">
-                <a16:creationId xmlns:a16="http://schemas.microsoft.com/office/drawing/2014/main" id="{C0219A9B-A4FE-4DE6-9279-4D60283C55B6}"/>
+                <a16:creationId xmlns:a16="http://schemas.microsoft.com/office/drawing/2014/main" id="{4C082B5E-0FBF-46E5-893C-2A2ADB47D0DD}"/>
               </a:ext>
             </a:extLst>
           </p:cNvPr>
@@ -5424,7 +5520,7 @@
         <p:spPr>
           <a:xfrm xmlns:a="http://schemas.openxmlformats.org/drawingml/2006/main">
             <a:off x="838200" y="2343150"/>
-            <a:ext cx="8496300" cy="552450"/>
+            <a:ext cx="8248650" cy="552450"/>
           </a:xfrm>
           <a:prstGeom xmlns:a="http://schemas.openxmlformats.org/drawingml/2006/main" prst="rect">
             <a:avLst/>
@@ -5442,7 +5538,7 @@
               </a:defRPr>
             </a:pPr>
             <a:r>
-              <a:t>В результате практики была создана рабочая основа Telegram-бота, готовая к демонстрации и дальнейшему развитию.</a:t>
+              <a:t>В результате практики создан и развернут рабочий Telegram-бот, готовый к демонстрации на защите.</a:t>
             </a:r>
           </a:p>
         </p:txBody>
@@ -5452,7 +5548,7 @@
           <p:cNvPr id="5" name="section-number-07">
             <a:extLst xmlns:a="http://schemas.openxmlformats.org/drawingml/2006/main">
               <a:ext uri="{FF2B5EF4-FFF2-40B4-BE49-F238E27FC236}">
-                <a16:creationId xmlns:a16="http://schemas.microsoft.com/office/drawing/2014/main" id="{2B628977-1A91-4B57-9500-5BDF51A465AD}"/>
+                <a16:creationId xmlns:a16="http://schemas.microsoft.com/office/drawing/2014/main" id="{D55265DD-6C5F-42CA-9693-DE2512BD9360}"/>
               </a:ext>
             </a:extLst>
           </p:cNvPr>
@@ -5492,7 +5588,7 @@
           <p:cNvPr id="6" name="">
             <a:extLst xmlns:a="http://schemas.openxmlformats.org/drawingml/2006/main">
               <a:ext uri="{FF2B5EF4-FFF2-40B4-BE49-F238E27FC236}">
-                <a16:creationId xmlns:a16="http://schemas.microsoft.com/office/drawing/2014/main" id="{F79CB505-47D5-4E8F-B206-8C99B76FD776}"/>
+                <a16:creationId xmlns:a16="http://schemas.microsoft.com/office/drawing/2014/main" id="{02253AC4-4660-4B00-B7DC-E2522D16CCFD}"/>
               </a:ext>
             </a:extLst>
           </p:cNvPr>
@@ -5532,7 +5628,7 @@
           <p:cNvPr id="7" name="">
             <a:extLst xmlns:a="http://schemas.openxmlformats.org/drawingml/2006/main">
               <a:ext uri="{FF2B5EF4-FFF2-40B4-BE49-F238E27FC236}">
-                <a16:creationId xmlns:a16="http://schemas.microsoft.com/office/drawing/2014/main" id="{1B78B027-4432-4604-95F7-3F94865CA421}"/>
+                <a16:creationId xmlns:a16="http://schemas.microsoft.com/office/drawing/2014/main" id="{627187C3-1315-4D75-8F0A-5DF55897E7A7}"/>
               </a:ext>
             </a:extLst>
           </p:cNvPr>
@@ -5544,7 +5640,7 @@
         <p:spPr>
           <a:xfrm xmlns:a="http://schemas.openxmlformats.org/drawingml/2006/main">
             <a:off x="838200" y="3638550"/>
-            <a:ext cx="8477250" cy="2686050"/>
+            <a:ext cx="8477250" cy="2971800"/>
           </a:xfrm>
           <a:prstGeom xmlns:a="http://schemas.openxmlformats.org/drawingml/2006/main" prst="rect">
             <a:avLst/>
@@ -5586,7 +5682,7 @@
               </a:defRPr>
             </a:pPr>
             <a:r>
-              <a:t>• Реализованы карточки, тренировки, словарь и прогресс.</a:t>
+              <a:t>• Реализованы карточки, тренировки, словарь, прогресс и выбор языка.</a:t>
             </a:r>
           </a:p>
           <a:p xmlns:a="http://schemas.openxmlformats.org/drawingml/2006/main">
@@ -5610,7 +5706,7 @@
               </a:defRPr>
             </a:pPr>
             <a:r>
-              <a:t>• Настроена база данных через SQLAlchemy.</a:t>
+              <a:t>• Настроена PostgreSQL-база через SQLAlchemy.</a:t>
             </a:r>
           </a:p>
           <a:p xmlns:a="http://schemas.openxmlformats.org/drawingml/2006/main">
@@ -5658,7 +5754,7 @@
               </a:defRPr>
             </a:pPr>
             <a:r>
-              <a:t>• Подготовлены README, схема БД, архитектура и user flow.</a:t>
+              <a:t>• Проект развернут на Aeza VPS и запущен через systemd.</a:t>
             </a:r>
           </a:p>
         </p:txBody>
@@ -5668,7 +5764,7 @@
           <p:cNvPr id="8" name="">
             <a:extLst xmlns:a="http://schemas.openxmlformats.org/drawingml/2006/main">
               <a:ext uri="{FF2B5EF4-FFF2-40B4-BE49-F238E27FC236}">
-                <a16:creationId xmlns:a16="http://schemas.microsoft.com/office/drawing/2014/main" id="{0C955A12-FBFD-44DB-8018-E48C778E56B3}"/>
+                <a16:creationId xmlns:a16="http://schemas.microsoft.com/office/drawing/2014/main" id="{5A6F412B-832F-431B-9500-0CAFAC261893}"/>
               </a:ext>
             </a:extLst>
           </p:cNvPr>
@@ -5708,7 +5804,7 @@
           <p:cNvPr id="9" name="">
             <a:extLst xmlns:a="http://schemas.openxmlformats.org/drawingml/2006/main">
               <a:ext uri="{FF2B5EF4-FFF2-40B4-BE49-F238E27FC236}">
-                <a16:creationId xmlns:a16="http://schemas.microsoft.com/office/drawing/2014/main" id="{99F8F31E-A4F5-4155-89E3-0A791F34BB04}"/>
+                <a16:creationId xmlns:a16="http://schemas.microsoft.com/office/drawing/2014/main" id="{8C5C053B-81B3-45ED-A3EE-5ED4D8B93D74}"/>
               </a:ext>
             </a:extLst>
           </p:cNvPr>
@@ -5738,7 +5834,7 @@
               </a:defRPr>
             </a:pPr>
             <a:r>
-              <a:t>• Развертывание бота на сервере для постоянного аптайма.</a:t>
+              <a:t>• Расширение учебного контента и добавление новых языков.</a:t>
             </a:r>
           </a:p>
           <a:p xmlns:a="http://schemas.openxmlformats.org/drawingml/2006/main">
@@ -5762,7 +5858,7 @@
               </a:defRPr>
             </a:pPr>
             <a:r>
-              <a:t>• Подключение production PostgreSQL.</a:t>
+              <a:t>• Добавление Alembic для версионирования миграций.</a:t>
             </a:r>
           </a:p>
           <a:p xmlns:a="http://schemas.openxmlformats.org/drawingml/2006/main">
@@ -5786,7 +5882,7 @@
               </a:defRPr>
             </a:pPr>
             <a:r>
-              <a:t>• Добавление Alembic для версионирования миграций.</a:t>
+              <a:t>• Подключение внешнего словаря или переводчика.</a:t>
             </a:r>
           </a:p>
           <a:p xmlns:a="http://schemas.openxmlformats.org/drawingml/2006/main">
@@ -5810,7 +5906,7 @@
               </a:defRPr>
             </a:pPr>
             <a:r>
-              <a:t>• Расширение контента и дальнейшая стабилизация.</a:t>
+              <a:t>• Создание админ-панели для управления темами и карточками.</a:t>
             </a:r>
           </a:p>
         </p:txBody>
@@ -5820,7 +5916,7 @@
           <p:cNvPr id="10" name="source">
             <a:extLst xmlns:a="http://schemas.openxmlformats.org/drawingml/2006/main">
               <a:ext uri="{FF2B5EF4-FFF2-40B4-BE49-F238E27FC236}">
-                <a16:creationId xmlns:a16="http://schemas.microsoft.com/office/drawing/2014/main" id="{DA1555C5-AF8E-4E0B-B747-06D3CD609E08}"/>
+                <a16:creationId xmlns:a16="http://schemas.microsoft.com/office/drawing/2014/main" id="{EE365DCA-A6C2-4603-AFDA-4B700AA9A380}"/>
               </a:ext>
             </a:extLst>
           </p:cNvPr>
@@ -5858,7 +5954,7 @@
     </p:spTree>
     <p:extLst>
       <p:ext uri="{BB962C8B-B14F-4D97-AF65-F5344CB8AC3E}">
-        <p14:creationId xmlns:p14="http://schemas.microsoft.com/office/powerpoint/2010/main" val="113292736"/>
+        <p14:creationId xmlns:p14="http://schemas.microsoft.com/office/powerpoint/2010/main" val="61286470"/>
       </p:ext>
     </p:extLst>
   </p:cSld>
